--- a/docs/slides/應用場景_V2.pptx
+++ b/docs/slides/應用場景_V2.pptx
@@ -1968,7 +1968,158 @@
       </p:sp>
       <p:sp>
         <p:nvSpPr>
-          <p:cNvPr id="17" name="Shape 12"/>
+          <p:cNvPr id="17" name="Text 12"/>
+          <p:cNvSpPr/>
+          <p:nvPr/>
+        </p:nvSpPr>
+        <p:spPr>
+          <a:xfrm>
+            <a:off x="5486400" y="3675888"/>
+            <a:ext cx="6391656" cy="237744"/>
+          </a:xfrm>
+          <a:prstGeom prst="rect">
+            <a:avLst/>
+          </a:prstGeom>
+          <a:noFill/>
+          <a:ln/>
+        </p:spPr>
+        <p:txBody>
+          <a:bodyPr wrap="square" lIns="0" tIns="0" rIns="0" bIns="0" rtlCol="0" anchor="ctr"/>
+          <a:lstStyle/>
+          <a:p>
+            <a:pPr algn="r" indent="0" marL="0">
+              <a:buNone/>
+            </a:pPr>
+            <a:r>
+              <a:rPr lang="en-US" sz="1000" b="1" dirty="0">
+                <a:solidFill>
+                  <a:srgbClr val="5E74A0"/>
+                </a:solidFill>
+                <a:latin typeface="Microsoft JhengHei" pitchFamily="34" charset="0"/>
+                <a:ea typeface="Microsoft JhengHei" pitchFamily="34" charset="-122"/>
+                <a:cs typeface="Microsoft JhengHei" pitchFamily="34" charset="-120"/>
+              </a:rPr>
+              <a:t>場景可體驗階段　</a:t>
+            </a:r>
+            <a:pPr algn="r" indent="0" marL="0">
+              <a:buNone/>
+            </a:pPr>
+            <a:r>
+              <a:rPr lang="en-US" sz="1000" b="1" dirty="0">
+                <a:solidFill>
+                  <a:srgbClr val="69D6A8"/>
+                </a:solidFill>
+                <a:latin typeface="Microsoft JhengHei" pitchFamily="34" charset="0"/>
+                <a:ea typeface="Microsoft JhengHei" pitchFamily="34" charset="-122"/>
+                <a:cs typeface="Microsoft JhengHei" pitchFamily="34" charset="-120"/>
+              </a:rPr>
+              <a:t>P0 </a:t>
+            </a:r>
+            <a:pPr algn="r" indent="0" marL="0">
+              <a:buNone/>
+            </a:pPr>
+            <a:r>
+              <a:rPr lang="en-US" sz="1000" dirty="0">
+                <a:solidFill>
+                  <a:srgbClr val="5E74A0"/>
+                </a:solidFill>
+                <a:latin typeface="Microsoft JhengHei" pitchFamily="34" charset="0"/>
+                <a:ea typeface="Microsoft JhengHei" pitchFamily="34" charset="-122"/>
+                <a:cs typeface="Microsoft JhengHei" pitchFamily="34" charset="-120"/>
+              </a:rPr>
+              <a:t>預售樣品屋　</a:t>
+            </a:r>
+            <a:pPr algn="r" indent="0" marL="0">
+              <a:buNone/>
+            </a:pPr>
+            <a:r>
+              <a:rPr lang="en-US" sz="1000" b="1" dirty="0">
+                <a:solidFill>
+                  <a:srgbClr val="C9A35A"/>
+                </a:solidFill>
+                <a:latin typeface="Microsoft JhengHei" pitchFamily="34" charset="0"/>
+                <a:ea typeface="Microsoft JhengHei" pitchFamily="34" charset="-122"/>
+                <a:cs typeface="Microsoft JhengHei" pitchFamily="34" charset="-120"/>
+              </a:rPr>
+              <a:t>P1 </a:t>
+            </a:r>
+            <a:pPr algn="r" indent="0" marL="0">
+              <a:buNone/>
+            </a:pPr>
+            <a:r>
+              <a:rPr lang="en-US" sz="1000" dirty="0">
+                <a:solidFill>
+                  <a:srgbClr val="5E74A0"/>
+                </a:solidFill>
+                <a:latin typeface="Microsoft JhengHei" pitchFamily="34" charset="0"/>
+                <a:ea typeface="Microsoft JhengHei" pitchFamily="34" charset="-122"/>
+                <a:cs typeface="Microsoft JhengHei" pitchFamily="34" charset="-120"/>
+              </a:rPr>
+              <a:t>交屋營運　</a:t>
+            </a:r>
+            <a:pPr algn="r" indent="0" marL="0">
+              <a:buNone/>
+            </a:pPr>
+            <a:r>
+              <a:rPr lang="en-US" sz="1000" b="1" dirty="0">
+                <a:solidFill>
+                  <a:srgbClr val="6FB1FF"/>
+                </a:solidFill>
+                <a:latin typeface="Microsoft JhengHei" pitchFamily="34" charset="0"/>
+                <a:ea typeface="Microsoft JhengHei" pitchFamily="34" charset="-122"/>
+                <a:cs typeface="Microsoft JhengHei" pitchFamily="34" charset="-120"/>
+              </a:rPr>
+              <a:t>P2 </a:t>
+            </a:r>
+            <a:pPr algn="r" indent="0" marL="0">
+              <a:buNone/>
+            </a:pPr>
+            <a:r>
+              <a:rPr lang="en-US" sz="1000" dirty="0">
+                <a:solidFill>
+                  <a:srgbClr val="5E74A0"/>
+                </a:solidFill>
+                <a:latin typeface="Microsoft JhengHei" pitchFamily="34" charset="0"/>
+                <a:ea typeface="Microsoft JhengHei" pitchFamily="34" charset="-122"/>
+                <a:cs typeface="Microsoft JhengHei" pitchFamily="34" charset="-120"/>
+              </a:rPr>
+              <a:t>智慧入住　</a:t>
+            </a:r>
+            <a:pPr algn="r" indent="0" marL="0">
+              <a:buNone/>
+            </a:pPr>
+            <a:r>
+              <a:rPr lang="en-US" sz="1000" b="1" dirty="0">
+                <a:solidFill>
+                  <a:srgbClr val="E6CF9A"/>
+                </a:solidFill>
+                <a:latin typeface="Microsoft JhengHei" pitchFamily="34" charset="0"/>
+                <a:ea typeface="Microsoft JhengHei" pitchFamily="34" charset="-122"/>
+                <a:cs typeface="Microsoft JhengHei" pitchFamily="34" charset="-120"/>
+              </a:rPr>
+              <a:t>P3 </a:t>
+            </a:r>
+            <a:pPr algn="r" indent="0" marL="0">
+              <a:buNone/>
+            </a:pPr>
+            <a:r>
+              <a:rPr lang="en-US" sz="1000" dirty="0">
+                <a:solidFill>
+                  <a:srgbClr val="5E74A0"/>
+                </a:solidFill>
+                <a:latin typeface="Microsoft JhengHei" pitchFamily="34" charset="0"/>
+                <a:ea typeface="Microsoft JhengHei" pitchFamily="34" charset="-122"/>
+                <a:cs typeface="Microsoft JhengHei" pitchFamily="34" charset="-120"/>
+              </a:rPr>
+              <a:t>旗艦完善</a:t>
+            </a:r>
+            <a:endParaRPr lang="en-US" sz="1000" dirty="0"/>
+          </a:p>
+        </p:txBody>
+      </p:sp>
+      <p:sp>
+        <p:nvSpPr>
+          <p:cNvPr id="18" name="Shape 13"/>
           <p:cNvSpPr/>
           <p:nvPr/>
         </p:nvSpPr>
@@ -2006,7 +2157,7 @@
       </p:sp>
       <p:sp>
         <p:nvSpPr>
-          <p:cNvPr id="18" name="Shape 13"/>
+          <p:cNvPr id="19" name="Shape 14"/>
           <p:cNvSpPr/>
           <p:nvPr/>
         </p:nvSpPr>
@@ -2033,7 +2184,7 @@
       </p:sp>
       <p:sp>
         <p:nvSpPr>
-          <p:cNvPr id="19" name="Text 14"/>
+          <p:cNvPr id="20" name="Text 15"/>
           <p:cNvSpPr/>
           <p:nvPr/>
         </p:nvSpPr>
@@ -2069,7 +2220,77 @@
       </p:sp>
       <p:sp>
         <p:nvSpPr>
-          <p:cNvPr id="20" name="Text 15"/>
+          <p:cNvPr id="21" name="Shape 16"/>
+          <p:cNvSpPr/>
+          <p:nvPr/>
+        </p:nvSpPr>
+        <p:spPr>
+          <a:xfrm>
+            <a:off x="1847088" y="3950208"/>
+            <a:ext cx="512064" cy="274320"/>
+          </a:xfrm>
+          <a:prstGeom prst="roundRect">
+            <a:avLst>
+              <a:gd name="adj" fmla="val 26667"/>
+            </a:avLst>
+          </a:prstGeom>
+          <a:solidFill>
+            <a:srgbClr val="69D6A8"/>
+          </a:solidFill>
+          <a:ln w="11430">
+            <a:solidFill>
+              <a:srgbClr val="0B1220"/>
+            </a:solidFill>
+            <a:prstDash val="solid"/>
+          </a:ln>
+          <a:effectLst>
+            <a:outerShdw sx="100000" sy="100000" kx="0" ky="0" algn="bl" rotWithShape="0" blurRad="63500" dist="25400" dir="5400000">
+              <a:srgbClr val="000000">
+                <a:alpha val="40000"/>
+              </a:srgbClr>
+            </a:outerShdw>
+          </a:effectLst>
+        </p:spPr>
+      </p:sp>
+      <p:sp>
+        <p:nvSpPr>
+          <p:cNvPr id="22" name="Text 17"/>
+          <p:cNvSpPr/>
+          <p:nvPr/>
+        </p:nvSpPr>
+        <p:spPr>
+          <a:xfrm>
+            <a:off x="1847088" y="3950208"/>
+            <a:ext cx="512064" cy="274320"/>
+          </a:xfrm>
+          <a:prstGeom prst="rect">
+            <a:avLst/>
+          </a:prstGeom>
+          <a:noFill/>
+          <a:ln/>
+        </p:spPr>
+        <p:txBody>
+          <a:bodyPr wrap="square" lIns="0" tIns="0" rIns="0" bIns="0" rtlCol="0" anchor="ctr"/>
+          <a:lstStyle/>
+          <a:p>
+            <a:pPr algn="ctr" indent="0" marL="0">
+              <a:buNone/>
+            </a:pPr>
+            <a:r>
+              <a:rPr lang="en-US" sz="1100" b="1" dirty="0">
+                <a:solidFill>
+                  <a:srgbClr val="0B1220"/>
+                </a:solidFill>
+              </a:rPr>
+              <a:t>P0</a:t>
+            </a:r>
+            <a:endParaRPr lang="en-US" sz="1100" dirty="0"/>
+          </a:p>
+        </p:txBody>
+      </p:sp>
+      <p:sp>
+        <p:nvSpPr>
+          <p:cNvPr id="23" name="Text 18"/>
           <p:cNvSpPr/>
           <p:nvPr/>
         </p:nvSpPr>
@@ -2122,7 +2343,7 @@
       </p:sp>
       <p:pic>
         <p:nvPicPr>
-          <p:cNvPr id="21" name="Image 3" descr="preencoded.png">    </p:cNvPr>
+          <p:cNvPr id="24" name="Image 3" descr="preencoded.png">    </p:cNvPr>
           <p:cNvPicPr>
             <a:picLocks noChangeAspect="1"/>
           </p:cNvPicPr>
@@ -2146,7 +2367,7 @@
       </p:pic>
       <p:sp>
         <p:nvSpPr>
-          <p:cNvPr id="22" name="Text 16"/>
+          <p:cNvPr id="25" name="Text 19"/>
           <p:cNvSpPr/>
           <p:nvPr/>
         </p:nvSpPr>
@@ -2202,7 +2423,7 @@
       </p:sp>
       <p:pic>
         <p:nvPicPr>
-          <p:cNvPr id="23" name="Image 4" descr="preencoded.png">    </p:cNvPr>
+          <p:cNvPr id="26" name="Image 4" descr="preencoded.png">    </p:cNvPr>
           <p:cNvPicPr>
             <a:picLocks noChangeAspect="1"/>
           </p:cNvPicPr>
@@ -2226,7 +2447,7 @@
       </p:pic>
       <p:sp>
         <p:nvSpPr>
-          <p:cNvPr id="24" name="Text 17"/>
+          <p:cNvPr id="27" name="Text 20"/>
           <p:cNvSpPr/>
           <p:nvPr/>
         </p:nvSpPr>
@@ -2282,7 +2503,7 @@
       </p:sp>
       <p:pic>
         <p:nvPicPr>
-          <p:cNvPr id="25" name="Image 5" descr="preencoded.png">    </p:cNvPr>
+          <p:cNvPr id="28" name="Image 5" descr="preencoded.png">    </p:cNvPr>
           <p:cNvPicPr>
             <a:picLocks noChangeAspect="1"/>
           </p:cNvPicPr>
@@ -2306,7 +2527,7 @@
       </p:pic>
       <p:sp>
         <p:nvSpPr>
-          <p:cNvPr id="26" name="Text 18"/>
+          <p:cNvPr id="29" name="Text 21"/>
           <p:cNvSpPr/>
           <p:nvPr/>
         </p:nvSpPr>
@@ -2362,7 +2583,7 @@
       </p:sp>
       <p:sp>
         <p:nvSpPr>
-          <p:cNvPr id="27" name="Text 19"/>
+          <p:cNvPr id="30" name="Text 22"/>
           <p:cNvSpPr/>
           <p:nvPr/>
         </p:nvSpPr>
@@ -2398,7 +2619,7 @@
       </p:sp>
       <p:sp>
         <p:nvSpPr>
-          <p:cNvPr id="28" name="Text 20"/>
+          <p:cNvPr id="31" name="Text 23"/>
           <p:cNvSpPr/>
           <p:nvPr/>
         </p:nvSpPr>
@@ -2434,7 +2655,7 @@
       </p:sp>
       <p:sp>
         <p:nvSpPr>
-          <p:cNvPr id="29" name="Shape 21"/>
+          <p:cNvPr id="32" name="Shape 24"/>
           <p:cNvSpPr/>
           <p:nvPr/>
         </p:nvSpPr>
@@ -2459,7 +2680,7 @@
       </p:sp>
       <p:sp>
         <p:nvSpPr>
-          <p:cNvPr id="30" name="Text 22"/>
+          <p:cNvPr id="33" name="Text 25"/>
           <p:cNvSpPr/>
           <p:nvPr/>
         </p:nvSpPr>
@@ -2526,7 +2747,7 @@
       </p:sp>
       <p:sp>
         <p:nvSpPr>
-          <p:cNvPr id="31" name="Shape 23"/>
+          <p:cNvPr id="34" name="Shape 26"/>
           <p:cNvSpPr/>
           <p:nvPr/>
         </p:nvSpPr>
@@ -2564,7 +2785,7 @@
       </p:sp>
       <p:sp>
         <p:nvSpPr>
-          <p:cNvPr id="32" name="Shape 24"/>
+          <p:cNvPr id="35" name="Shape 27"/>
           <p:cNvSpPr/>
           <p:nvPr/>
         </p:nvSpPr>
@@ -2591,7 +2812,7 @@
       </p:sp>
       <p:sp>
         <p:nvSpPr>
-          <p:cNvPr id="33" name="Text 25"/>
+          <p:cNvPr id="36" name="Text 28"/>
           <p:cNvSpPr/>
           <p:nvPr/>
         </p:nvSpPr>
@@ -2627,7 +2848,77 @@
       </p:sp>
       <p:sp>
         <p:nvSpPr>
-          <p:cNvPr id="34" name="Text 26"/>
+          <p:cNvPr id="37" name="Shape 29"/>
+          <p:cNvSpPr/>
+          <p:nvPr/>
+        </p:nvSpPr>
+        <p:spPr>
+          <a:xfrm>
+            <a:off x="4187952" y="3950208"/>
+            <a:ext cx="512064" cy="274320"/>
+          </a:xfrm>
+          <a:prstGeom prst="roundRect">
+            <a:avLst>
+              <a:gd name="adj" fmla="val 26667"/>
+            </a:avLst>
+          </a:prstGeom>
+          <a:solidFill>
+            <a:srgbClr val="E6CF9A"/>
+          </a:solidFill>
+          <a:ln w="11430">
+            <a:solidFill>
+              <a:srgbClr val="0B1220"/>
+            </a:solidFill>
+            <a:prstDash val="solid"/>
+          </a:ln>
+          <a:effectLst>
+            <a:outerShdw sx="100000" sy="100000" kx="0" ky="0" algn="bl" rotWithShape="0" blurRad="63500" dist="25400" dir="5400000">
+              <a:srgbClr val="000000">
+                <a:alpha val="40000"/>
+              </a:srgbClr>
+            </a:outerShdw>
+          </a:effectLst>
+        </p:spPr>
+      </p:sp>
+      <p:sp>
+        <p:nvSpPr>
+          <p:cNvPr id="38" name="Text 30"/>
+          <p:cNvSpPr/>
+          <p:nvPr/>
+        </p:nvSpPr>
+        <p:spPr>
+          <a:xfrm>
+            <a:off x="4187952" y="3950208"/>
+            <a:ext cx="512064" cy="274320"/>
+          </a:xfrm>
+          <a:prstGeom prst="rect">
+            <a:avLst/>
+          </a:prstGeom>
+          <a:noFill/>
+          <a:ln/>
+        </p:spPr>
+        <p:txBody>
+          <a:bodyPr wrap="square" lIns="0" tIns="0" rIns="0" bIns="0" rtlCol="0" anchor="ctr"/>
+          <a:lstStyle/>
+          <a:p>
+            <a:pPr algn="ctr" indent="0" marL="0">
+              <a:buNone/>
+            </a:pPr>
+            <a:r>
+              <a:rPr lang="en-US" sz="1100" b="1" dirty="0">
+                <a:solidFill>
+                  <a:srgbClr val="0B1220"/>
+                </a:solidFill>
+              </a:rPr>
+              <a:t>P3</a:t>
+            </a:r>
+            <a:endParaRPr lang="en-US" sz="1100" dirty="0"/>
+          </a:p>
+        </p:txBody>
+      </p:sp>
+      <p:sp>
+        <p:nvSpPr>
+          <p:cNvPr id="39" name="Text 31"/>
           <p:cNvSpPr/>
           <p:nvPr/>
         </p:nvSpPr>
@@ -2680,7 +2971,7 @@
       </p:sp>
       <p:pic>
         <p:nvPicPr>
-          <p:cNvPr id="35" name="Image 6" descr="preencoded.png">    </p:cNvPr>
+          <p:cNvPr id="40" name="Image 6" descr="preencoded.png">    </p:cNvPr>
           <p:cNvPicPr>
             <a:picLocks noChangeAspect="1"/>
           </p:cNvPicPr>
@@ -2704,7 +2995,7 @@
       </p:pic>
       <p:sp>
         <p:nvSpPr>
-          <p:cNvPr id="36" name="Text 27"/>
+          <p:cNvPr id="41" name="Text 32"/>
           <p:cNvSpPr/>
           <p:nvPr/>
         </p:nvSpPr>
@@ -2760,7 +3051,7 @@
       </p:sp>
       <p:pic>
         <p:nvPicPr>
-          <p:cNvPr id="37" name="Image 7" descr="preencoded.png">    </p:cNvPr>
+          <p:cNvPr id="42" name="Image 7" descr="preencoded.png">    </p:cNvPr>
           <p:cNvPicPr>
             <a:picLocks noChangeAspect="1"/>
           </p:cNvPicPr>
@@ -2784,7 +3075,7 @@
       </p:pic>
       <p:sp>
         <p:nvSpPr>
-          <p:cNvPr id="38" name="Text 28"/>
+          <p:cNvPr id="43" name="Text 33"/>
           <p:cNvSpPr/>
           <p:nvPr/>
         </p:nvSpPr>
@@ -2840,7 +3131,7 @@
       </p:sp>
       <p:pic>
         <p:nvPicPr>
-          <p:cNvPr id="39" name="Image 8" descr="preencoded.png">    </p:cNvPr>
+          <p:cNvPr id="44" name="Image 8" descr="preencoded.png">    </p:cNvPr>
           <p:cNvPicPr>
             <a:picLocks noChangeAspect="1"/>
           </p:cNvPicPr>
@@ -2864,7 +3155,7 @@
       </p:pic>
       <p:sp>
         <p:nvSpPr>
-          <p:cNvPr id="40" name="Text 29"/>
+          <p:cNvPr id="45" name="Text 34"/>
           <p:cNvSpPr/>
           <p:nvPr/>
         </p:nvSpPr>
@@ -2920,7 +3211,7 @@
       </p:sp>
       <p:sp>
         <p:nvSpPr>
-          <p:cNvPr id="41" name="Text 30"/>
+          <p:cNvPr id="46" name="Text 35"/>
           <p:cNvSpPr/>
           <p:nvPr/>
         </p:nvSpPr>
@@ -2956,7 +3247,7 @@
       </p:sp>
       <p:sp>
         <p:nvSpPr>
-          <p:cNvPr id="42" name="Text 31"/>
+          <p:cNvPr id="47" name="Text 36"/>
           <p:cNvSpPr/>
           <p:nvPr/>
         </p:nvSpPr>
@@ -2992,7 +3283,7 @@
       </p:sp>
       <p:sp>
         <p:nvSpPr>
-          <p:cNvPr id="43" name="Shape 32"/>
+          <p:cNvPr id="48" name="Shape 37"/>
           <p:cNvSpPr/>
           <p:nvPr/>
         </p:nvSpPr>
@@ -3017,7 +3308,7 @@
       </p:sp>
       <p:sp>
         <p:nvSpPr>
-          <p:cNvPr id="44" name="Text 33"/>
+          <p:cNvPr id="49" name="Text 38"/>
           <p:cNvSpPr/>
           <p:nvPr/>
         </p:nvSpPr>
@@ -3084,7 +3375,7 @@
       </p:sp>
       <p:sp>
         <p:nvSpPr>
-          <p:cNvPr id="45" name="Shape 34"/>
+          <p:cNvPr id="50" name="Shape 39"/>
           <p:cNvSpPr/>
           <p:nvPr/>
         </p:nvSpPr>
@@ -3122,7 +3413,7 @@
       </p:sp>
       <p:sp>
         <p:nvSpPr>
-          <p:cNvPr id="46" name="Shape 35"/>
+          <p:cNvPr id="51" name="Shape 40"/>
           <p:cNvSpPr/>
           <p:nvPr/>
         </p:nvSpPr>
@@ -3149,7 +3440,7 @@
       </p:sp>
       <p:sp>
         <p:nvSpPr>
-          <p:cNvPr id="47" name="Text 36"/>
+          <p:cNvPr id="52" name="Text 41"/>
           <p:cNvSpPr/>
           <p:nvPr/>
         </p:nvSpPr>
@@ -3185,7 +3476,77 @@
       </p:sp>
       <p:sp>
         <p:nvSpPr>
-          <p:cNvPr id="48" name="Text 37"/>
+          <p:cNvPr id="53" name="Shape 42"/>
+          <p:cNvSpPr/>
+          <p:nvPr/>
+        </p:nvSpPr>
+        <p:spPr>
+          <a:xfrm>
+            <a:off x="6528816" y="3950208"/>
+            <a:ext cx="512064" cy="274320"/>
+          </a:xfrm>
+          <a:prstGeom prst="roundRect">
+            <a:avLst>
+              <a:gd name="adj" fmla="val 26667"/>
+            </a:avLst>
+          </a:prstGeom>
+          <a:solidFill>
+            <a:srgbClr val="E6CF9A"/>
+          </a:solidFill>
+          <a:ln w="11430">
+            <a:solidFill>
+              <a:srgbClr val="0B1220"/>
+            </a:solidFill>
+            <a:prstDash val="solid"/>
+          </a:ln>
+          <a:effectLst>
+            <a:outerShdw sx="100000" sy="100000" kx="0" ky="0" algn="bl" rotWithShape="0" blurRad="63500" dist="25400" dir="5400000">
+              <a:srgbClr val="000000">
+                <a:alpha val="40000"/>
+              </a:srgbClr>
+            </a:outerShdw>
+          </a:effectLst>
+        </p:spPr>
+      </p:sp>
+      <p:sp>
+        <p:nvSpPr>
+          <p:cNvPr id="54" name="Text 43"/>
+          <p:cNvSpPr/>
+          <p:nvPr/>
+        </p:nvSpPr>
+        <p:spPr>
+          <a:xfrm>
+            <a:off x="6528816" y="3950208"/>
+            <a:ext cx="512064" cy="274320"/>
+          </a:xfrm>
+          <a:prstGeom prst="rect">
+            <a:avLst/>
+          </a:prstGeom>
+          <a:noFill/>
+          <a:ln/>
+        </p:spPr>
+        <p:txBody>
+          <a:bodyPr wrap="square" lIns="0" tIns="0" rIns="0" bIns="0" rtlCol="0" anchor="ctr"/>
+          <a:lstStyle/>
+          <a:p>
+            <a:pPr algn="ctr" indent="0" marL="0">
+              <a:buNone/>
+            </a:pPr>
+            <a:r>
+              <a:rPr lang="en-US" sz="1100" b="1" dirty="0">
+                <a:solidFill>
+                  <a:srgbClr val="0B1220"/>
+                </a:solidFill>
+              </a:rPr>
+              <a:t>P3</a:t>
+            </a:r>
+            <a:endParaRPr lang="en-US" sz="1100" dirty="0"/>
+          </a:p>
+        </p:txBody>
+      </p:sp>
+      <p:sp>
+        <p:nvSpPr>
+          <p:cNvPr id="55" name="Text 44"/>
           <p:cNvSpPr/>
           <p:nvPr/>
         </p:nvSpPr>
@@ -3238,7 +3599,7 @@
       </p:sp>
       <p:pic>
         <p:nvPicPr>
-          <p:cNvPr id="49" name="Image 9" descr="preencoded.png">    </p:cNvPr>
+          <p:cNvPr id="56" name="Image 9" descr="preencoded.png">    </p:cNvPr>
           <p:cNvPicPr>
             <a:picLocks noChangeAspect="1"/>
           </p:cNvPicPr>
@@ -3262,7 +3623,7 @@
       </p:pic>
       <p:sp>
         <p:nvSpPr>
-          <p:cNvPr id="50" name="Text 38"/>
+          <p:cNvPr id="57" name="Text 45"/>
           <p:cNvSpPr/>
           <p:nvPr/>
         </p:nvSpPr>
@@ -3318,7 +3679,7 @@
       </p:sp>
       <p:pic>
         <p:nvPicPr>
-          <p:cNvPr id="51" name="Image 10" descr="preencoded.png">    </p:cNvPr>
+          <p:cNvPr id="58" name="Image 10" descr="preencoded.png">    </p:cNvPr>
           <p:cNvPicPr>
             <a:picLocks noChangeAspect="1"/>
           </p:cNvPicPr>
@@ -3342,7 +3703,7 @@
       </p:pic>
       <p:sp>
         <p:nvSpPr>
-          <p:cNvPr id="52" name="Text 39"/>
+          <p:cNvPr id="59" name="Text 46"/>
           <p:cNvSpPr/>
           <p:nvPr/>
         </p:nvSpPr>
@@ -3398,7 +3759,7 @@
       </p:sp>
       <p:pic>
         <p:nvPicPr>
-          <p:cNvPr id="53" name="Image 11" descr="preencoded.png">    </p:cNvPr>
+          <p:cNvPr id="60" name="Image 11" descr="preencoded.png">    </p:cNvPr>
           <p:cNvPicPr>
             <a:picLocks noChangeAspect="1"/>
           </p:cNvPicPr>
@@ -3422,7 +3783,7 @@
       </p:pic>
       <p:sp>
         <p:nvSpPr>
-          <p:cNvPr id="54" name="Text 40"/>
+          <p:cNvPr id="61" name="Text 47"/>
           <p:cNvSpPr/>
           <p:nvPr/>
         </p:nvSpPr>
@@ -3478,7 +3839,7 @@
       </p:sp>
       <p:sp>
         <p:nvSpPr>
-          <p:cNvPr id="55" name="Text 41"/>
+          <p:cNvPr id="62" name="Text 48"/>
           <p:cNvSpPr/>
           <p:nvPr/>
         </p:nvSpPr>
@@ -3514,7 +3875,7 @@
       </p:sp>
       <p:sp>
         <p:nvSpPr>
-          <p:cNvPr id="56" name="Text 42"/>
+          <p:cNvPr id="63" name="Text 49"/>
           <p:cNvSpPr/>
           <p:nvPr/>
         </p:nvSpPr>
@@ -3550,7 +3911,7 @@
       </p:sp>
       <p:sp>
         <p:nvSpPr>
-          <p:cNvPr id="57" name="Shape 43"/>
+          <p:cNvPr id="64" name="Shape 50"/>
           <p:cNvSpPr/>
           <p:nvPr/>
         </p:nvSpPr>
@@ -3575,7 +3936,7 @@
       </p:sp>
       <p:sp>
         <p:nvSpPr>
-          <p:cNvPr id="58" name="Text 44"/>
+          <p:cNvPr id="65" name="Text 51"/>
           <p:cNvSpPr/>
           <p:nvPr/>
         </p:nvSpPr>
@@ -3642,7 +4003,7 @@
       </p:sp>
       <p:sp>
         <p:nvSpPr>
-          <p:cNvPr id="59" name="Shape 45"/>
+          <p:cNvPr id="66" name="Shape 52"/>
           <p:cNvSpPr/>
           <p:nvPr/>
         </p:nvSpPr>
@@ -3680,7 +4041,7 @@
       </p:sp>
       <p:sp>
         <p:nvSpPr>
-          <p:cNvPr id="60" name="Shape 46"/>
+          <p:cNvPr id="67" name="Shape 53"/>
           <p:cNvSpPr/>
           <p:nvPr/>
         </p:nvSpPr>
@@ -3707,7 +4068,7 @@
       </p:sp>
       <p:sp>
         <p:nvSpPr>
-          <p:cNvPr id="61" name="Text 47"/>
+          <p:cNvPr id="68" name="Text 54"/>
           <p:cNvSpPr/>
           <p:nvPr/>
         </p:nvSpPr>
@@ -3743,7 +4104,77 @@
       </p:sp>
       <p:sp>
         <p:nvSpPr>
-          <p:cNvPr id="62" name="Text 48"/>
+          <p:cNvPr id="69" name="Shape 55"/>
+          <p:cNvSpPr/>
+          <p:nvPr/>
+        </p:nvSpPr>
+        <p:spPr>
+          <a:xfrm>
+            <a:off x="8869680" y="3950208"/>
+            <a:ext cx="512064" cy="274320"/>
+          </a:xfrm>
+          <a:prstGeom prst="roundRect">
+            <a:avLst>
+              <a:gd name="adj" fmla="val 26667"/>
+            </a:avLst>
+          </a:prstGeom>
+          <a:solidFill>
+            <a:srgbClr val="6FB1FF"/>
+          </a:solidFill>
+          <a:ln w="11430">
+            <a:solidFill>
+              <a:srgbClr val="0B1220"/>
+            </a:solidFill>
+            <a:prstDash val="solid"/>
+          </a:ln>
+          <a:effectLst>
+            <a:outerShdw sx="100000" sy="100000" kx="0" ky="0" algn="bl" rotWithShape="0" blurRad="63500" dist="25400" dir="5400000">
+              <a:srgbClr val="000000">
+                <a:alpha val="40000"/>
+              </a:srgbClr>
+            </a:outerShdw>
+          </a:effectLst>
+        </p:spPr>
+      </p:sp>
+      <p:sp>
+        <p:nvSpPr>
+          <p:cNvPr id="70" name="Text 56"/>
+          <p:cNvSpPr/>
+          <p:nvPr/>
+        </p:nvSpPr>
+        <p:spPr>
+          <a:xfrm>
+            <a:off x="8869680" y="3950208"/>
+            <a:ext cx="512064" cy="274320"/>
+          </a:xfrm>
+          <a:prstGeom prst="rect">
+            <a:avLst/>
+          </a:prstGeom>
+          <a:noFill/>
+          <a:ln/>
+        </p:spPr>
+        <p:txBody>
+          <a:bodyPr wrap="square" lIns="0" tIns="0" rIns="0" bIns="0" rtlCol="0" anchor="ctr"/>
+          <a:lstStyle/>
+          <a:p>
+            <a:pPr algn="ctr" indent="0" marL="0">
+              <a:buNone/>
+            </a:pPr>
+            <a:r>
+              <a:rPr lang="en-US" sz="1100" b="1" dirty="0">
+                <a:solidFill>
+                  <a:srgbClr val="0B1220"/>
+                </a:solidFill>
+              </a:rPr>
+              <a:t>P2</a:t>
+            </a:r>
+            <a:endParaRPr lang="en-US" sz="1100" dirty="0"/>
+          </a:p>
+        </p:txBody>
+      </p:sp>
+      <p:sp>
+        <p:nvSpPr>
+          <p:cNvPr id="71" name="Text 57"/>
           <p:cNvSpPr/>
           <p:nvPr/>
         </p:nvSpPr>
@@ -3796,7 +4227,7 @@
       </p:sp>
       <p:pic>
         <p:nvPicPr>
-          <p:cNvPr id="63" name="Image 12" descr="preencoded.png">    </p:cNvPr>
+          <p:cNvPr id="72" name="Image 12" descr="preencoded.png">    </p:cNvPr>
           <p:cNvPicPr>
             <a:picLocks noChangeAspect="1"/>
           </p:cNvPicPr>
@@ -3820,7 +4251,7 @@
       </p:pic>
       <p:sp>
         <p:nvSpPr>
-          <p:cNvPr id="64" name="Text 49"/>
+          <p:cNvPr id="73" name="Text 58"/>
           <p:cNvSpPr/>
           <p:nvPr/>
         </p:nvSpPr>
@@ -3876,7 +4307,7 @@
       </p:sp>
       <p:pic>
         <p:nvPicPr>
-          <p:cNvPr id="65" name="Image 13" descr="preencoded.png">    </p:cNvPr>
+          <p:cNvPr id="74" name="Image 13" descr="preencoded.png">    </p:cNvPr>
           <p:cNvPicPr>
             <a:picLocks noChangeAspect="1"/>
           </p:cNvPicPr>
@@ -3900,7 +4331,7 @@
       </p:pic>
       <p:sp>
         <p:nvSpPr>
-          <p:cNvPr id="66" name="Text 50"/>
+          <p:cNvPr id="75" name="Text 59"/>
           <p:cNvSpPr/>
           <p:nvPr/>
         </p:nvSpPr>
@@ -3956,7 +4387,7 @@
       </p:sp>
       <p:pic>
         <p:nvPicPr>
-          <p:cNvPr id="67" name="Image 14" descr="preencoded.png">    </p:cNvPr>
+          <p:cNvPr id="76" name="Image 14" descr="preencoded.png">    </p:cNvPr>
           <p:cNvPicPr>
             <a:picLocks noChangeAspect="1"/>
           </p:cNvPicPr>
@@ -3980,7 +4411,7 @@
       </p:pic>
       <p:sp>
         <p:nvSpPr>
-          <p:cNvPr id="68" name="Text 51"/>
+          <p:cNvPr id="77" name="Text 60"/>
           <p:cNvSpPr/>
           <p:nvPr/>
         </p:nvSpPr>
@@ -4036,7 +4467,7 @@
       </p:sp>
       <p:sp>
         <p:nvSpPr>
-          <p:cNvPr id="69" name="Text 52"/>
+          <p:cNvPr id="78" name="Text 61"/>
           <p:cNvSpPr/>
           <p:nvPr/>
         </p:nvSpPr>
@@ -4072,7 +4503,7 @@
       </p:sp>
       <p:sp>
         <p:nvSpPr>
-          <p:cNvPr id="70" name="Text 53"/>
+          <p:cNvPr id="79" name="Text 62"/>
           <p:cNvSpPr/>
           <p:nvPr/>
         </p:nvSpPr>
@@ -4108,7 +4539,7 @@
       </p:sp>
       <p:sp>
         <p:nvSpPr>
-          <p:cNvPr id="71" name="Shape 54"/>
+          <p:cNvPr id="80" name="Shape 63"/>
           <p:cNvSpPr/>
           <p:nvPr/>
         </p:nvSpPr>
@@ -4133,7 +4564,7 @@
       </p:sp>
       <p:sp>
         <p:nvSpPr>
-          <p:cNvPr id="72" name="Text 55"/>
+          <p:cNvPr id="81" name="Text 64"/>
           <p:cNvSpPr/>
           <p:nvPr/>
         </p:nvSpPr>
@@ -4200,7 +4631,7 @@
       </p:sp>
       <p:sp>
         <p:nvSpPr>
-          <p:cNvPr id="73" name="Shape 56"/>
+          <p:cNvPr id="82" name="Shape 65"/>
           <p:cNvSpPr/>
           <p:nvPr/>
         </p:nvSpPr>
@@ -4238,7 +4669,7 @@
       </p:sp>
       <p:sp>
         <p:nvSpPr>
-          <p:cNvPr id="74" name="Shape 57"/>
+          <p:cNvPr id="83" name="Shape 66"/>
           <p:cNvSpPr/>
           <p:nvPr/>
         </p:nvSpPr>
@@ -4265,7 +4696,7 @@
       </p:sp>
       <p:sp>
         <p:nvSpPr>
-          <p:cNvPr id="75" name="Text 58"/>
+          <p:cNvPr id="84" name="Text 67"/>
           <p:cNvSpPr/>
           <p:nvPr/>
         </p:nvSpPr>
@@ -4301,7 +4732,77 @@
       </p:sp>
       <p:sp>
         <p:nvSpPr>
-          <p:cNvPr id="76" name="Text 59"/>
+          <p:cNvPr id="85" name="Shape 68"/>
+          <p:cNvSpPr/>
+          <p:nvPr/>
+        </p:nvSpPr>
+        <p:spPr>
+          <a:xfrm>
+            <a:off x="11210544" y="3950208"/>
+            <a:ext cx="512064" cy="274320"/>
+          </a:xfrm>
+          <a:prstGeom prst="roundRect">
+            <a:avLst>
+              <a:gd name="adj" fmla="val 26667"/>
+            </a:avLst>
+          </a:prstGeom>
+          <a:solidFill>
+            <a:srgbClr val="C9A35A"/>
+          </a:solidFill>
+          <a:ln w="11430">
+            <a:solidFill>
+              <a:srgbClr val="0B1220"/>
+            </a:solidFill>
+            <a:prstDash val="solid"/>
+          </a:ln>
+          <a:effectLst>
+            <a:outerShdw sx="100000" sy="100000" kx="0" ky="0" algn="bl" rotWithShape="0" blurRad="63500" dist="25400" dir="5400000">
+              <a:srgbClr val="000000">
+                <a:alpha val="40000"/>
+              </a:srgbClr>
+            </a:outerShdw>
+          </a:effectLst>
+        </p:spPr>
+      </p:sp>
+      <p:sp>
+        <p:nvSpPr>
+          <p:cNvPr id="86" name="Text 69"/>
+          <p:cNvSpPr/>
+          <p:nvPr/>
+        </p:nvSpPr>
+        <p:spPr>
+          <a:xfrm>
+            <a:off x="11210544" y="3950208"/>
+            <a:ext cx="512064" cy="274320"/>
+          </a:xfrm>
+          <a:prstGeom prst="rect">
+            <a:avLst/>
+          </a:prstGeom>
+          <a:noFill/>
+          <a:ln/>
+        </p:spPr>
+        <p:txBody>
+          <a:bodyPr wrap="square" lIns="0" tIns="0" rIns="0" bIns="0" rtlCol="0" anchor="ctr"/>
+          <a:lstStyle/>
+          <a:p>
+            <a:pPr algn="ctr" indent="0" marL="0">
+              <a:buNone/>
+            </a:pPr>
+            <a:r>
+              <a:rPr lang="en-US" sz="1100" b="1" dirty="0">
+                <a:solidFill>
+                  <a:srgbClr val="0B1220"/>
+                </a:solidFill>
+              </a:rPr>
+              <a:t>P1</a:t>
+            </a:r>
+            <a:endParaRPr lang="en-US" sz="1100" dirty="0"/>
+          </a:p>
+        </p:txBody>
+      </p:sp>
+      <p:sp>
+        <p:nvSpPr>
+          <p:cNvPr id="87" name="Text 70"/>
           <p:cNvSpPr/>
           <p:nvPr/>
         </p:nvSpPr>
@@ -4354,7 +4855,7 @@
       </p:sp>
       <p:pic>
         <p:nvPicPr>
-          <p:cNvPr id="77" name="Image 15" descr="preencoded.png">    </p:cNvPr>
+          <p:cNvPr id="88" name="Image 15" descr="preencoded.png">    </p:cNvPr>
           <p:cNvPicPr>
             <a:picLocks noChangeAspect="1"/>
           </p:cNvPicPr>
@@ -4378,7 +4879,7 @@
       </p:pic>
       <p:sp>
         <p:nvSpPr>
-          <p:cNvPr id="78" name="Text 60"/>
+          <p:cNvPr id="89" name="Text 71"/>
           <p:cNvSpPr/>
           <p:nvPr/>
         </p:nvSpPr>
@@ -4434,7 +4935,7 @@
       </p:sp>
       <p:pic>
         <p:nvPicPr>
-          <p:cNvPr id="79" name="Image 16" descr="preencoded.png">    </p:cNvPr>
+          <p:cNvPr id="90" name="Image 16" descr="preencoded.png">    </p:cNvPr>
           <p:cNvPicPr>
             <a:picLocks noChangeAspect="1"/>
           </p:cNvPicPr>
@@ -4458,7 +4959,7 @@
       </p:pic>
       <p:sp>
         <p:nvSpPr>
-          <p:cNvPr id="80" name="Text 61"/>
+          <p:cNvPr id="91" name="Text 72"/>
           <p:cNvSpPr/>
           <p:nvPr/>
         </p:nvSpPr>
@@ -4514,7 +5015,7 @@
       </p:sp>
       <p:pic>
         <p:nvPicPr>
-          <p:cNvPr id="81" name="Image 17" descr="preencoded.png">    </p:cNvPr>
+          <p:cNvPr id="92" name="Image 17" descr="preencoded.png">    </p:cNvPr>
           <p:cNvPicPr>
             <a:picLocks noChangeAspect="1"/>
           </p:cNvPicPr>
@@ -4538,7 +5039,7 @@
       </p:pic>
       <p:sp>
         <p:nvSpPr>
-          <p:cNvPr id="82" name="Text 62"/>
+          <p:cNvPr id="93" name="Text 73"/>
           <p:cNvSpPr/>
           <p:nvPr/>
         </p:nvSpPr>
@@ -4594,7 +5095,7 @@
       </p:sp>
       <p:sp>
         <p:nvSpPr>
-          <p:cNvPr id="83" name="Text 63"/>
+          <p:cNvPr id="94" name="Text 74"/>
           <p:cNvSpPr/>
           <p:nvPr/>
         </p:nvSpPr>
@@ -4630,7 +5131,7 @@
       </p:sp>
       <p:sp>
         <p:nvSpPr>
-          <p:cNvPr id="84" name="Text 64"/>
+          <p:cNvPr id="95" name="Text 75"/>
           <p:cNvSpPr/>
           <p:nvPr/>
         </p:nvSpPr>
@@ -4666,7 +5167,7 @@
       </p:sp>
       <p:sp>
         <p:nvSpPr>
-          <p:cNvPr id="85" name="Shape 65"/>
+          <p:cNvPr id="96" name="Shape 76"/>
           <p:cNvSpPr/>
           <p:nvPr/>
         </p:nvSpPr>
@@ -4691,7 +5192,7 @@
       </p:sp>
       <p:sp>
         <p:nvSpPr>
-          <p:cNvPr id="86" name="Text 66"/>
+          <p:cNvPr id="97" name="Text 77"/>
           <p:cNvSpPr/>
           <p:nvPr/>
         </p:nvSpPr>
@@ -4758,7 +5259,7 @@
       </p:sp>
       <p:sp>
         <p:nvSpPr>
-          <p:cNvPr id="87" name="Text 67"/>
+          <p:cNvPr id="98" name="Text 78"/>
           <p:cNvSpPr/>
           <p:nvPr/>
         </p:nvSpPr>
@@ -4794,7 +5295,7 @@
       </p:sp>
       <p:sp>
         <p:nvSpPr>
-          <p:cNvPr id="88" name="Text 68"/>
+          <p:cNvPr id="99" name="Text 79"/>
           <p:cNvSpPr/>
           <p:nvPr/>
         </p:nvSpPr>
